--- a/docs/ZeroInvest_Investimento_via_Trustt_SCP.pptx
+++ b/docs/ZeroInvest_Investimento_via_Trustt_SCP.pptx
@@ -117,33 +117,33 @@
   <p:extLst>
     <p:ext uri="{521415D9-36F7-43E2-AB2F-B90AF26B5E84}">
       <p14:sectionLst xmlns:p14="http://schemas.microsoft.com/office/powerpoint/2010/main">
-        <p14:section name="Abertura" id="{4bc781e9-5ab6-c663-62f7-46a4b0f035f8}">
+        <p14:section name="Abertura" id="{ace848cd-f317-b6ca-d5d5-e2147b7f0806}">
           <p14:sldIdLst>
             <p14:sldId id="256"/>
           </p14:sldIdLst>
         </p14:section>
-        <p14:section name="Tese" id="{942b5ef4-e9c5-e210-ca43-6dccf8d29098}">
+        <p14:section name="Tese" id="{ec25373e-fe65-bb36-229c-b17bf07633b9}">
           <p14:sldIdLst>
             <p14:sldId id="257"/>
             <p14:sldId id="258"/>
             <p14:sldId id="259"/>
           </p14:sldIdLst>
         </p14:section>
-        <p14:section name="Estrutura" id="{01e8a486-97c9-6efc-ab45-b66c87a719c2}">
+        <p14:section name="Estrutura" id="{560370f4-3f2b-b5bc-a244-5c567b3061bc}">
           <p14:sldIdLst>
             <p14:sldId id="260"/>
             <p14:sldId id="261"/>
             <p14:sldId id="262"/>
           </p14:sldIdLst>
         </p14:section>
-        <p14:section name="Escala" id="{b9f173f9-7079-2318-7a21-b7469cef7a36}">
+        <p14:section name="Escala" id="{df786c5e-52a5-e2ba-4772-8f757e6941b9}">
           <p14:sldIdLst>
             <p14:sldId id="263"/>
             <p14:sldId id="264"/>
             <p14:sldId id="265"/>
           </p14:sldIdLst>
         </p14:section>
-        <p14:section name="Próximos passos" id="{3e301d40-8377-2045-215c-0fc9344fbeb0}">
+        <p14:section name="Próximos passos" id="{09050ebb-3be7-4275-5988-6f714631795b}">
           <p14:sldIdLst>
             <p14:sldId id="266"/>
           </p14:sldIdLst>
@@ -220,7 +220,7 @@
           </c:spPr>
           <c:invertIfNegative val="0"/>
           <c:dLbls>
-            <c:numFmt formatCode="&quot;R$ &quot;0.0&quot; mi&quot;" sourceLinked="0"/>
+            <c:numFmt formatCode="&quot;R$ &quot;0&quot;,&quot;0&quot; mi&quot;" sourceLinked="0"/>
             <c:txPr>
               <a:bodyPr/>
               <a:lstStyle/>
@@ -302,20 +302,20 @@
                 <c:formatCode>General</c:formatCode>
                 <c:ptCount val="3"/>
                 <c:pt idx="0">
-                  <c:v>9.1</c:v>
+                  <c:v>91</c:v>
                 </c:pt>
                 <c:pt idx="1">
-                  <c:v>27.3</c:v>
+                  <c:v>273</c:v>
                 </c:pt>
                 <c:pt idx="2">
-                  <c:v>45.4</c:v>
+                  <c:v>454</c:v>
                 </c:pt>
               </c:numCache>
             </c:numRef>
           </c:val>
         </c:ser>
         <c:dLbls>
-          <c:numFmt formatCode="&quot;R$ &quot;0.0&quot; mi&quot;" sourceLinked="0"/>
+          <c:numFmt formatCode="&quot;R$ &quot;0&quot;,&quot;0&quot; mi&quot;" sourceLinked="0"/>
           <c:txPr>
             <a:bodyPr/>
             <a:lstStyle/>
@@ -387,7 +387,7 @@
         <c:axId val="2094734552"/>
         <c:scaling>
           <c:orientation val="minMax"/>
-          <c:max val="52"/>
+          <c:max val="520"/>
           <c:min val="0"/>
         </c:scaling>
         <c:delete val="1"/>
